--- a/docs/apresentacao-minicurso-estruturas.pptx
+++ b/docs/apresentacao-minicurso-estruturas.pptx
@@ -32433,7 +32433,7 @@
               </a:lnSpc>
             </a:pPr>
             <a:r>
-              <a:rPr lang="pt-BR" sz="1350" b="1">
+              <a:rPr lang="pt-BR" sz="1200" b="1">
                 <a:solidFill>
                   <a:srgbClr val="F4BA58"/>
                 </a:solidFill>
@@ -32441,9 +32441,9 @@
                 <a:ea typeface="Aptos"/>
                 <a:cs typeface="Aptos"/>
               </a:rPr>
-              <a:t xml:space="preserve">Produtor</a:t>
-            </a:r>
-            <a:endParaRPr lang="pt-BR" sz="1350"/>
+              <a:t xml:space="preserve">Produtor · IDs</a:t>
+            </a:r>
+            <a:endParaRPr lang="pt-BR" sz="1200"/>
           </a:p>
           <a:p>
             <a:pPr algn="ctr">
@@ -32452,7 +32452,7 @@
               </a:lnSpc>
             </a:pPr>
             <a:r>
-              <a:rPr lang="pt-BR" sz="1350" b="1">
+              <a:rPr lang="pt-BR" sz="1200" b="1">
                 <a:solidFill>
                   <a:srgbClr val="F4BA58"/>
                 </a:solidFill>
@@ -32460,9 +32460,28 @@
                 <a:ea typeface="Aptos"/>
                 <a:cs typeface="Aptos"/>
               </a:rPr>
-              <a:t xml:space="preserve">evento 401…406</a:t>
-            </a:r>
-            <a:endParaRPr lang="pt-BR" sz="1350"/>
+              <a:t xml:space="preserve">401, 402, 401</a:t>
+            </a:r>
+            <a:endParaRPr lang="pt-BR" sz="1200"/>
+          </a:p>
+          <a:p>
+            <a:pPr algn="ctr">
+              <a:lnSpc>
+                <a:spcPct val="105000"/>
+              </a:lnSpc>
+            </a:pPr>
+            <a:r>
+              <a:rPr lang="pt-BR" sz="1200" b="1">
+                <a:solidFill>
+                  <a:srgbClr val="F4BA58"/>
+                </a:solidFill>
+                <a:latin typeface="Aptos"/>
+                <a:ea typeface="Aptos"/>
+                <a:cs typeface="Aptos"/>
+              </a:rPr>
+              <a:t xml:space="preserve">404, 405, 406</a:t>
+            </a:r>
+            <a:endParaRPr lang="pt-BR" sz="1200"/>
           </a:p>
         </p:txBody>
       </p:sp>
